--- a/cursos/recursos/el-mapa-de-los-finales/04-dos-peones-contra-rey.pptx
+++ b/cursos/recursos/el-mapa-de-los-finales/04-dos-peones-contra-rey.pptx
@@ -5302,7 +5302,7 @@
                 </a:solidFill>
                 <a:latin typeface="Calibri"/>
               </a:rPr>
-              <a:t>Contá antes de mover: en cada diagrama decidí el resultado y luego comprobalo jugando ambos bandos.</a:t>
+              <a:t>Cuenta antes de mover: en cada diagrama decide el resultado y luego compruébalo jugando ambos bandos.</a:t>
             </a:r>
           </a:p>
           <a:p>
@@ -5373,7 +5373,7 @@
                 </a:solidFill>
                 <a:latin typeface="Calibri"/>
               </a:rPr>
-              <a:t>•  Recorré cada línea principal hasta entender el porqué de cada jugada.</a:t>
+              <a:t>•  Recorre cada línea principal hasta entender el porqué de cada jugada.</a:t>
             </a:r>
           </a:p>
           <a:p>
@@ -5389,7 +5389,7 @@
                 </a:solidFill>
                 <a:latin typeface="Calibri"/>
               </a:rPr>
-              <a:t>•  Practicá primero las posiciones clave, después las demás.</a:t>
+              <a:t>•  Practica primero las posiciones clave, después las demás.</a:t>
             </a:r>
           </a:p>
           <a:p>
@@ -5405,7 +5405,7 @@
                 </a:solidFill>
                 <a:latin typeface="Calibri"/>
               </a:rPr>
-              <a:t>•  Anotá las reglas de cada final con tus palabras.</a:t>
+              <a:t>•  Anota las reglas de cada final con tus palabras.</a:t>
             </a:r>
           </a:p>
         </p:txBody>
